--- a/要件定義書_非機能要件_20260917_v2.pptx
+++ b/要件定義書_非機能要件_20260917_v2.pptx
@@ -14844,7 +14844,7 @@
                           <a:latin typeface="メイリオ" panose="020B0604030504040204" pitchFamily="50" charset="-128"/>
                           <a:ea typeface="メイリオ" panose="020B0604030504040204" pitchFamily="50" charset="-128"/>
                         </a:rPr>
-                        <a:t>Vuls</a:t>
+                        <a:t>NESSUS</a:t>
                       </a:r>
                       <a:endParaRPr kumimoji="1" lang="en-US" altLang="ja-JP" sz="1050" dirty="0">
                         <a:solidFill>
@@ -16895,39 +16895,7 @@
                 <a:ea typeface="メイリオ"/>
                 <a:cs typeface="メイリオ"/>
               </a:rPr>
-              <a:t>リリース</a:t>
-            </a:r>
-            <a:r>
-              <a:rPr lang="en-US" altLang="ja-JP" dirty="0">
-                <a:latin typeface="メイリオ"/>
-                <a:ea typeface="メイリオ"/>
-                <a:cs typeface="メイリオ"/>
-              </a:rPr>
-              <a:t>5</a:t>
-            </a:r>
-            <a:r>
-              <a:rPr lang="ja-JP" altLang="en-US" dirty="0">
-                <a:latin typeface="メイリオ"/>
-                <a:ea typeface="メイリオ"/>
-                <a:cs typeface="メイリオ"/>
-              </a:rPr>
-              <a:t>年後、アクティブユーザ数が</a:t>
-            </a:r>
-            <a:r>
-              <a:rPr lang="en-US" altLang="ja-JP" dirty="0">
-                <a:latin typeface="メイリオ"/>
-                <a:ea typeface="メイリオ"/>
-                <a:cs typeface="メイリオ"/>
-              </a:rPr>
-              <a:t>20</a:t>
-            </a:r>
-            <a:r>
-              <a:rPr lang="ja-JP" altLang="en-US" dirty="0">
-                <a:latin typeface="メイリオ"/>
-                <a:ea typeface="メイリオ"/>
-                <a:cs typeface="メイリオ"/>
-              </a:rPr>
-              <a:t>％増加する想定</a:t>
+              <a:t>リリース5年後、アクティブユーザ数が2倍に増加する想定（12.の成長倍率2倍に対応）</a:t>
             </a:r>
             <a:endParaRPr lang="en-US" altLang="ja-JP" dirty="0">
               <a:latin typeface="メイリオ"/>
@@ -16989,7 +16957,7 @@
                 <a:ea typeface="メイリオ"/>
                 <a:cs typeface="メイリオ"/>
               </a:rPr>
-              <a:t>管理サイトの想定同時アクセス（ログイン）数は各担当2名と想定（5年後も据え置き）</a:t>
+              <a:t>管理サイトの想定同時アクセス（ログイン）数は、★常時は全員、★随時は2割（最低2名）と想定</a:t>
             </a:r>
             <a:endParaRPr lang="en-US" altLang="ja-JP" dirty="0">
               <a:latin typeface="メイリオ"/>
@@ -17810,7 +17778,7 @@
                           <a:latin typeface="メイリオ" panose="020B0604030504040204" pitchFamily="50" charset="-128"/>
                           <a:ea typeface="メイリオ" panose="020B0604030504040204" pitchFamily="50" charset="-128"/>
                         </a:rPr>
-                        <a:t>4,080名</a:t>
+                        <a:t>6,800名</a:t>
                       </a:r>
                       <a:endParaRPr kumimoji="1" lang="en-US" altLang="ja-JP" sz="1050" dirty="0">
                         <a:solidFill>
@@ -17837,7 +17805,7 @@
                           <a:latin typeface="メイリオ" panose="020B0604030504040204" pitchFamily="50" charset="-128"/>
                           <a:ea typeface="メイリオ" panose="020B0604030504040204" pitchFamily="50" charset="-128"/>
                         </a:rPr>
-                        <a:t>123名</a:t>
+                        <a:t>204名</a:t>
                       </a:r>
                       <a:endParaRPr kumimoji="1" lang="en-US" altLang="ja-JP" sz="1050" dirty="0">
                         <a:solidFill>
@@ -18034,7 +18002,7 @@
                           <a:latin typeface="メイリオ" panose="020B0604030504040204" pitchFamily="50" charset="-128"/>
                           <a:ea typeface="メイリオ" panose="020B0604030504040204" pitchFamily="50" charset="-128"/>
                         </a:rPr>
-                        <a:t>4,080名</a:t>
+                        <a:t>6,800名</a:t>
                       </a:r>
                       <a:endParaRPr kumimoji="1" lang="en-US" altLang="ja-JP" sz="1050" dirty="0">
                         <a:solidFill>
@@ -18061,7 +18029,7 @@
                           <a:latin typeface="メイリオ" panose="020B0604030504040204" pitchFamily="50" charset="-128"/>
                           <a:ea typeface="メイリオ" panose="020B0604030504040204" pitchFamily="50" charset="-128"/>
                         </a:rPr>
-                        <a:t>123名</a:t>
+                        <a:t>204名</a:t>
                       </a:r>
                       <a:endParaRPr kumimoji="1" lang="en-US" altLang="ja-JP" sz="1050" dirty="0">
                         <a:solidFill>
@@ -18682,17 +18650,7 @@
                           <a:latin typeface="メイリオ" panose="020B0604030504040204" pitchFamily="50" charset="-128"/>
                           <a:ea typeface="メイリオ" panose="020B0604030504040204" pitchFamily="50" charset="-128"/>
                         </a:rPr>
-                        <a:t>2</a:t>
-                      </a:r>
-                      <a:r>
-                        <a:rPr kumimoji="1" lang="ja-JP" altLang="en-US" sz="1050" dirty="0">
-                          <a:solidFill>
-                            <a:schemeClr val="tx1"/>
-                          </a:solidFill>
-                          <a:latin typeface="メイリオ" panose="020B0604030504040204" pitchFamily="50" charset="-128"/>
-                          <a:ea typeface="メイリオ" panose="020B0604030504040204" pitchFamily="50" charset="-128"/>
-                        </a:rPr>
-                        <a:t>名</a:t>
+                        <a:t>2名</a:t>
                       </a:r>
                       <a:endParaRPr kumimoji="1" lang="en-US" altLang="ja-JP" sz="1050" dirty="0">
                         <a:solidFill>
@@ -18735,7 +18693,7 @@
                           <a:latin typeface="メイリオ" panose="020B0604030504040204" pitchFamily="50" charset="-128"/>
                           <a:ea typeface="メイリオ" panose="020B0604030504040204" pitchFamily="50" charset="-128"/>
                         </a:rPr>
-                        <a:t>12名</a:t>
+                        <a:t>20名</a:t>
                       </a:r>
                     </a:p>
                   </a:txBody>
@@ -18771,7 +18729,7 @@
                           <a:latin typeface="メイリオ" panose="020B0604030504040204" pitchFamily="50" charset="-128"/>
                           <a:ea typeface="メイリオ" panose="020B0604030504040204" pitchFamily="50" charset="-128"/>
                         </a:rPr>
-                        <a:t>2名</a:t>
+                        <a:t>4名</a:t>
                       </a:r>
                       <a:endParaRPr kumimoji="1" lang="en-US" altLang="ja-JP" sz="1050" dirty="0">
                         <a:solidFill>
@@ -18947,17 +18905,7 @@
                           <a:latin typeface="メイリオ" panose="020B0604030504040204" pitchFamily="50" charset="-128"/>
                           <a:ea typeface="メイリオ" panose="020B0604030504040204" pitchFamily="50" charset="-128"/>
                         </a:rPr>
-                        <a:t>2</a:t>
-                      </a:r>
-                      <a:r>
-                        <a:rPr kumimoji="1" lang="ja-JP" altLang="en-US" sz="1050" dirty="0">
-                          <a:solidFill>
-                            <a:schemeClr val="tx1"/>
-                          </a:solidFill>
-                          <a:latin typeface="メイリオ" panose="020B0604030504040204" pitchFamily="50" charset="-128"/>
-                          <a:ea typeface="メイリオ" panose="020B0604030504040204" pitchFamily="50" charset="-128"/>
-                        </a:rPr>
-                        <a:t>名</a:t>
+                        <a:t>2名</a:t>
                       </a:r>
                       <a:endParaRPr kumimoji="1" lang="en-US" altLang="ja-JP" sz="1050" dirty="0">
                         <a:solidFill>
@@ -19000,7 +18948,7 @@
                           <a:latin typeface="メイリオ" panose="020B0604030504040204" pitchFamily="50" charset="-128"/>
                           <a:ea typeface="メイリオ" panose="020B0604030504040204" pitchFamily="50" charset="-128"/>
                         </a:rPr>
-                        <a:t>6名</a:t>
+                        <a:t>10名</a:t>
                       </a:r>
                       <a:endParaRPr lang="ja-JP" altLang="en-US" sz="1050" dirty="0">
                         <a:solidFill>
@@ -19259,17 +19207,7 @@
                           <a:latin typeface="メイリオ" panose="020B0604030504040204" pitchFamily="50" charset="-128"/>
                           <a:ea typeface="メイリオ" panose="020B0604030504040204" pitchFamily="50" charset="-128"/>
                         </a:rPr>
-                        <a:t>2</a:t>
-                      </a:r>
-                      <a:r>
-                        <a:rPr kumimoji="1" lang="ja-JP" altLang="en-US" sz="1050" dirty="0">
-                          <a:solidFill>
-                            <a:schemeClr val="tx1"/>
-                          </a:solidFill>
-                          <a:latin typeface="メイリオ" panose="020B0604030504040204" pitchFamily="50" charset="-128"/>
-                          <a:ea typeface="メイリオ" panose="020B0604030504040204" pitchFamily="50" charset="-128"/>
-                        </a:rPr>
-                        <a:t>名</a:t>
+                        <a:t>6名</a:t>
                       </a:r>
                       <a:endParaRPr kumimoji="1" lang="en-US" altLang="ja-JP" sz="1050" dirty="0">
                         <a:solidFill>
@@ -19312,7 +19250,7 @@
                           <a:latin typeface="メイリオ" panose="020B0604030504040204" pitchFamily="50" charset="-128"/>
                           <a:ea typeface="メイリオ" panose="020B0604030504040204" pitchFamily="50" charset="-128"/>
                         </a:rPr>
-                        <a:t>7名</a:t>
+                        <a:t>12名</a:t>
                       </a:r>
                       <a:endParaRPr lang="ja-JP" altLang="en-US" sz="1050" dirty="0">
                         <a:solidFill>
@@ -19339,7 +19277,7 @@
                           <a:latin typeface="メイリオ" panose="020B0604030504040204" pitchFamily="50" charset="-128"/>
                           <a:ea typeface="メイリオ" panose="020B0604030504040204" pitchFamily="50" charset="-128"/>
                         </a:rPr>
-                        <a:t>2名</a:t>
+                        <a:t>12名</a:t>
                       </a:r>
                       <a:endParaRPr kumimoji="1" lang="en-US" altLang="ja-JP" sz="1050" dirty="0">
                         <a:solidFill>
@@ -19501,17 +19439,7 @@
                           <a:latin typeface="メイリオ" panose="020B0604030504040204" pitchFamily="50" charset="-128"/>
                           <a:ea typeface="メイリオ" panose="020B0604030504040204" pitchFamily="50" charset="-128"/>
                         </a:rPr>
-                        <a:t>2</a:t>
-                      </a:r>
-                      <a:r>
-                        <a:rPr kumimoji="1" lang="ja-JP" altLang="en-US" sz="1050" dirty="0">
-                          <a:solidFill>
-                            <a:schemeClr val="tx1"/>
-                          </a:solidFill>
-                          <a:latin typeface="メイリオ" panose="020B0604030504040204" pitchFamily="50" charset="-128"/>
-                          <a:ea typeface="メイリオ" panose="020B0604030504040204" pitchFamily="50" charset="-128"/>
-                        </a:rPr>
-                        <a:t>名</a:t>
+                        <a:t>4名</a:t>
                       </a:r>
                       <a:endParaRPr kumimoji="1" lang="en-US" altLang="ja-JP" sz="1050" dirty="0">
                         <a:solidFill>
@@ -19554,7 +19482,7 @@
                           <a:latin typeface="メイリオ" panose="020B0604030504040204" pitchFamily="50" charset="-128"/>
                           <a:ea typeface="メイリオ" panose="020B0604030504040204" pitchFamily="50" charset="-128"/>
                         </a:rPr>
-                        <a:t>5名</a:t>
+                        <a:t>8名</a:t>
                       </a:r>
                     </a:p>
                   </a:txBody>
@@ -19574,7 +19502,7 @@
                           <a:latin typeface="メイリオ" panose="020B0604030504040204" pitchFamily="50" charset="-128"/>
                           <a:ea typeface="メイリオ" panose="020B0604030504040204" pitchFamily="50" charset="-128"/>
                         </a:rPr>
-                        <a:t>2名</a:t>
+                        <a:t>8名</a:t>
                       </a:r>
                       <a:endParaRPr kumimoji="1" lang="en-US" altLang="ja-JP" sz="1050" dirty="0">
                         <a:solidFill>
@@ -19750,17 +19678,7 @@
                           <a:latin typeface="メイリオ" panose="020B0604030504040204" pitchFamily="50" charset="-128"/>
                           <a:ea typeface="メイリオ" panose="020B0604030504040204" pitchFamily="50" charset="-128"/>
                         </a:rPr>
-                        <a:t>8</a:t>
-                      </a:r>
-                      <a:r>
-                        <a:rPr kumimoji="1" lang="ja-JP" altLang="en-US" sz="1050" b="1" dirty="0">
-                          <a:solidFill>
-                            <a:schemeClr val="tx1"/>
-                          </a:solidFill>
-                          <a:latin typeface="メイリオ" panose="020B0604030504040204" pitchFamily="50" charset="-128"/>
-                          <a:ea typeface="メイリオ" panose="020B0604030504040204" pitchFamily="50" charset="-128"/>
-                        </a:rPr>
-                        <a:t>名</a:t>
+                        <a:t>14名</a:t>
                       </a:r>
                       <a:endParaRPr kumimoji="1" lang="en-US" altLang="ja-JP" sz="1050" b="1" dirty="0">
                         <a:solidFill>
@@ -19787,7 +19705,7 @@
                           <a:latin typeface="メイリオ" panose="020B0604030504040204" pitchFamily="50" charset="-128"/>
                           <a:ea typeface="メイリオ" panose="020B0604030504040204" pitchFamily="50" charset="-128"/>
                         </a:rPr>
-                        <a:t>30名</a:t>
+                        <a:t>50名</a:t>
                       </a:r>
                       <a:endParaRPr kumimoji="1" lang="en-US" altLang="ja-JP" sz="1050" b="1" dirty="0">
                         <a:solidFill>
@@ -19814,7 +19732,7 @@
                           <a:latin typeface="メイリオ" panose="020B0604030504040204" pitchFamily="50" charset="-128"/>
                           <a:ea typeface="メイリオ" panose="020B0604030504040204" pitchFamily="50" charset="-128"/>
                         </a:rPr>
-                        <a:t>8名</a:t>
+                        <a:t>26名</a:t>
                       </a:r>
                       <a:endParaRPr kumimoji="1" lang="en-US" altLang="ja-JP" sz="1050" b="1" dirty="0">
                         <a:solidFill>
@@ -20001,7 +19919,7 @@
                           <a:latin typeface="メイリオ" panose="020B0604030504040204" pitchFamily="50" charset="-128"/>
                           <a:ea typeface="メイリオ" panose="020B0604030504040204" pitchFamily="50" charset="-128"/>
                         </a:rPr>
-                        <a:t>110名</a:t>
+                        <a:t>116名</a:t>
                       </a:r>
                       <a:endParaRPr kumimoji="1" lang="en-US" altLang="ja-JP" sz="1050" b="1" dirty="0">
                         <a:solidFill>
@@ -20028,7 +19946,7 @@
                           <a:latin typeface="メイリオ" panose="020B0604030504040204" pitchFamily="50" charset="-128"/>
                           <a:ea typeface="メイリオ" panose="020B0604030504040204" pitchFamily="50" charset="-128"/>
                         </a:rPr>
-                        <a:t>4,110名</a:t>
+                        <a:t>6,850名</a:t>
                       </a:r>
                       <a:endParaRPr kumimoji="1" lang="en-US" altLang="ja-JP" sz="1050" b="1" dirty="0">
                         <a:solidFill>
@@ -20055,7 +19973,7 @@
                           <a:latin typeface="メイリオ" panose="020B0604030504040204" pitchFamily="50" charset="-128"/>
                           <a:ea typeface="メイリオ" panose="020B0604030504040204" pitchFamily="50" charset="-128"/>
                         </a:rPr>
-                        <a:t>131名</a:t>
+                        <a:t>230名</a:t>
                       </a:r>
                       <a:endParaRPr kumimoji="1" lang="en-US" altLang="ja-JP" sz="1050" b="1" dirty="0">
                         <a:solidFill>
@@ -20411,7 +20329,7 @@
                 <a:ea typeface="メイリオ"/>
                 <a:cs typeface="メイリオ"/>
               </a:rPr>
-              <a:t>※SLA記載の同時接続利用者数100名（最善努力型）に対し、本案件は同時接続150名を目標値として別途調整します。</a:t>
+              <a:t>※SLA記載の同時接続利用者数100名（最善努力型）に対し、本案件は5年後230名を目標値として別途調整します。</a:t>
             </a:r>
             <a:endParaRPr lang="en-US" altLang="ja-JP" sz="1000" dirty="0">
               <a:solidFill>
@@ -23260,7 +23178,20 @@
                 <a:latin typeface="メイリオ" panose="020B0604030504040204" pitchFamily="50" charset="-128"/>
                 <a:ea typeface="メイリオ" panose="020B0604030504040204" pitchFamily="50" charset="-128"/>
               </a:rPr>
-              <a:t>※ 同時アクセス=分平均×滞在時間10分（注文基準の下限値。採用値は11.の110名／5年後131名）</a:t>
+              <a:t>※ 成長倍率2倍を5年後の想定とします（11.のアクティブユーザ2倍に対応）。</a:t>
+            </a:r>
+            <a:endParaRPr lang="en-US" altLang="ja-JP" sz="1100" dirty="0">
+              <a:latin typeface="メイリオ" panose="020B0604030504040204" pitchFamily="50" charset="-128"/>
+              <a:ea typeface="メイリオ" panose="020B0604030504040204" pitchFamily="50" charset="-128"/>
+            </a:endParaRPr>
+          </a:p>
+          <a:p>
+            <a:r>
+              <a:rPr lang="en-US" altLang="ja-JP" sz="1100" dirty="0">
+                <a:latin typeface="メイリオ" panose="020B0604030504040204" pitchFamily="50" charset="-128"/>
+                <a:ea typeface="メイリオ" panose="020B0604030504040204" pitchFamily="50" charset="-128"/>
+              </a:rPr>
+              <a:t>※ 同時アクセス=分平均×滞在時間10分（注文基準の下限値。採用値は11.の116名／5年後230名）</a:t>
             </a:r>
             <a:endParaRPr lang="en-US" altLang="ja-JP" sz="1100" dirty="0">
               <a:latin typeface="メイリオ" panose="020B0604030504040204" pitchFamily="50" charset="-128"/>
@@ -27690,6 +27621,47 @@
                         <a:cs typeface="メイリオ" pitchFamily="50" charset="-128"/>
                       </a:endParaRPr>
                     </a:p>
+                    <a:p>
+                      <a:pPr marL="0" marR="0" lvl="0" indent="0" algn="l" defTabSz="914400" rtl="0" eaLnBrk="0" fontAlgn="base" latinLnBrk="0" hangingPunct="0">
+                        <a:lnSpc>
+                          <a:spcPct val="100000"/>
+                        </a:lnSpc>
+                        <a:spcBef>
+                          <a:spcPct val="20000"/>
+                        </a:spcBef>
+                        <a:spcAft>
+                          <a:spcPct val="0"/>
+                        </a:spcAft>
+                        <a:buFontTx/>
+                        <a:buNone/>
+                      </a:pPr>
+                      <a:r>
+                        <a:rPr kumimoji="1" lang="ja-JP" altLang="en-US" sz="1000" u="none" strike="noStrike" cap="none" normalizeH="0" baseline="0" dirty="0">
+                          <a:ln>
+                            <a:noFill/>
+                          </a:ln>
+                          <a:effectLst/>
+                          <a:uFillTx/>
+                          <a:latin typeface="メイリオ" pitchFamily="50" charset="-128"/>
+                          <a:ea typeface="メイリオ" pitchFamily="50" charset="-128"/>
+                          <a:cs typeface="メイリオ" pitchFamily="50" charset="-128"/>
+                        </a:rPr>
+                        <a:t>日次バックアップのため最大24時間分の戻りが発生</a:t>
+                      </a:r>
+                      <a:endParaRPr kumimoji="1" lang="ja-JP" altLang="en-US" sz="1000" b="0" i="0" u="none" strike="noStrike" cap="none" normalizeH="0" baseline="0" dirty="0">
+                        <a:ln>
+                          <a:noFill/>
+                        </a:ln>
+                        <a:solidFill>
+                          <a:schemeClr val="tx1"/>
+                        </a:solidFill>
+                        <a:effectLst/>
+                        <a:uFillTx/>
+                        <a:latin typeface="メイリオ" pitchFamily="50" charset="-128"/>
+                        <a:ea typeface="メイリオ" pitchFamily="50" charset="-128"/>
+                        <a:cs typeface="メイリオ" pitchFamily="50" charset="-128"/>
+                      </a:endParaRPr>
+                    </a:p>
                   </a:txBody>
                   <a:tcPr marT="45649" marB="45649" horzOverflow="overflow"/>
                 </a:tc>
@@ -38088,49 +38060,7 @@
                           <a:latin typeface="メイリオ" panose="020B0604030504040204" pitchFamily="50" charset="-128"/>
                           <a:ea typeface="メイリオ" panose="020B0604030504040204" pitchFamily="50" charset="-128"/>
                         </a:rPr>
-                        <a:t>・</a:t>
-                      </a:r>
-                      <a:r>
-                        <a:rPr kumimoji="1" lang="en-US" altLang="ja-JP" sz="1000" dirty="0" err="1">
-                          <a:latin typeface="メイリオ" panose="020B0604030504040204" pitchFamily="50" charset="-128"/>
-                          <a:ea typeface="メイリオ" panose="020B0604030504040204" pitchFamily="50" charset="-128"/>
-                        </a:rPr>
-                        <a:t>Vuls</a:t>
-                      </a:r>
-                      <a:r>
-                        <a:rPr kumimoji="1" lang="ja-JP" altLang="en-US" sz="1000" dirty="0">
-                          <a:latin typeface="メイリオ" panose="020B0604030504040204" pitchFamily="50" charset="-128"/>
-                          <a:ea typeface="メイリオ" panose="020B0604030504040204" pitchFamily="50" charset="-128"/>
-                        </a:rPr>
-                        <a:t>による</a:t>
-                      </a:r>
-                      <a:r>
-                        <a:rPr kumimoji="1" lang="en-US" altLang="ja-JP" sz="1000" dirty="0">
-                          <a:latin typeface="メイリオ" panose="020B0604030504040204" pitchFamily="50" charset="-128"/>
-                          <a:ea typeface="メイリオ" panose="020B0604030504040204" pitchFamily="50" charset="-128"/>
-                        </a:rPr>
-                        <a:t>CVE</a:t>
-                      </a:r>
-                      <a:r>
-                        <a:rPr kumimoji="1" lang="ja-JP" altLang="en-US" sz="1000" dirty="0">
-                          <a:latin typeface="メイリオ" panose="020B0604030504040204" pitchFamily="50" charset="-128"/>
-                          <a:ea typeface="メイリオ" panose="020B0604030504040204" pitchFamily="50" charset="-128"/>
-                        </a:rPr>
-                        <a:t>を対象に</a:t>
-                      </a:r>
-                      <a:r>
-                        <a:rPr kumimoji="1" lang="en-US" altLang="ja-JP" sz="1000" dirty="0">
-                          <a:latin typeface="メイリオ" panose="020B0604030504040204" pitchFamily="50" charset="-128"/>
-                          <a:ea typeface="メイリオ" panose="020B0604030504040204" pitchFamily="50" charset="-128"/>
-                        </a:rPr>
-                        <a:t>OS</a:t>
-                      </a:r>
-                      <a:r>
-                        <a:rPr kumimoji="1" lang="ja-JP" altLang="en-US" sz="1000" dirty="0">
-                          <a:latin typeface="メイリオ" panose="020B0604030504040204" pitchFamily="50" charset="-128"/>
-                          <a:ea typeface="メイリオ" panose="020B0604030504040204" pitchFamily="50" charset="-128"/>
-                        </a:rPr>
-                        <a:t>、ミドルウェアの脆弱性検査を実施</a:t>
+                        <a:t>・NESSUSによるCVEを対象にOS、ミドルウェアの脆弱性検査を実施</a:t>
                       </a:r>
                     </a:p>
                   </a:txBody>
